--- a/decks/geog-africa/geog-africa_ch6_colonisation.pptx
+++ b/decks/geog-africa/geog-africa_ch6_colonisation.pptx
@@ -125,30 +125,30 @@
   <p:extLst>
     <p:ext uri="{521415D9-36F7-43E2-AB2F-B90AF26B5E84}">
       <p14:sectionLst xmlns:p14="http://schemas.microsoft.com/office/powerpoint/2010/main">
-        <p14:section name="Opening" id="{d9a3b59c-d206-ad07-3706-599ab77e8795}">
+        <p14:section name="Opening" id="{74aecf47-38e4-e99b-5c7a-dee79475e031}">
           <p14:sldIdLst>
             <p14:sldId id="256"/>
           </p14:sldIdLst>
         </p14:section>
-        <p14:section name="Gate" id="{ca077ae3-4d69-5b59-9d3c-80c14c4a7c12}">
+        <p14:section name="Gate" id="{42278dac-3e89-7ef7-f689-5f7efb924dac}">
           <p14:sldIdLst>
             <p14:sldId id="257"/>
             <p14:sldId id="258"/>
           </p14:sldIdLst>
         </p14:section>
-        <p14:section name="Pre-teach" id="{cbda3e2c-501c-fdff-8e82-1cdb597bcfeb}">
+        <p14:section name="Pre-teach" id="{8bbf531b-501f-57c1-a280-a40a604af250}">
           <p14:sldIdLst>
             <p14:sldId id="259"/>
             <p14:sldId id="260"/>
           </p14:sldIdLst>
         </p14:section>
-        <p14:section name="Read-along" id="{58082d1e-8165-a6b1-e5ff-c9b4f44a85b2}">
+        <p14:section name="Read-along" id="{1eaf828b-282e-4937-a7b6-e9e386c52642}">
           <p14:sldIdLst>
             <p14:sldId id="261"/>
             <p14:sldId id="262"/>
           </p14:sldIdLst>
         </p14:section>
-        <p14:section name="Teach" id="{f2de629f-44dd-bcea-7f4a-60987cc94698}">
+        <p14:section name="Teach" id="{2267ded2-e670-a0e6-bc13-33227ab9bf68}">
           <p14:sldIdLst>
             <p14:sldId id="263"/>
             <p14:sldId id="264"/>
@@ -156,7 +156,7 @@
             <p14:sldId id="266"/>
           </p14:sldIdLst>
         </p14:section>
-        <p14:section name="Routes" id="{ae877dd1-b93f-99f1-667e-d984ae22877d}">
+        <p14:section name="Routes" id="{5f77b876-67e6-f2b2-5444-15b3f6b9d1b9}">
           <p14:sldIdLst>
             <p14:sldId id="267"/>
             <p14:sldId id="268"/>
@@ -164,12 +164,12 @@
             <p14:sldId id="270"/>
           </p14:sldIdLst>
         </p14:section>
-        <p14:section name="Close" id="{c6806b02-a4b2-2026-2f56-d14f9bb337bb}">
+        <p14:section name="Close" id="{d3d0340d-1e78-0d45-e322-475cacf3b16d}">
           <p14:sldIdLst>
             <p14:sldId id="271"/>
           </p14:sldIdLst>
         </p14:section>
-        <p14:section name="Answers" id="{25569763-9f0c-4eae-9d60-9e066526482a}">
+        <p14:section name="Answers" id="{5cf80255-c2a4-dc32-82a6-d9c1a80fa8b7}">
           <p14:sldIdLst>
             <p14:sldId id="272"/>
             <p14:sldId id="273"/>
@@ -2255,7 +2255,7 @@
             <a:r>
               <a:rPr lang="en-US" dirty="0"/>
               <a:t>Teach — The scramble for Africa: 1850 to 1914. Say it in your own words, then check understanding with a quick question: ask a pupil from the pre-teach group first, since they met these words and ideas before the lesson. Pupils try to recall before you re-explain.
-Colonialism is the practice of acquiring control over another country, occupying it with settlers and exploiting it economically. To exploit means to make use of a people, place or thing for your own benefit. The opposite of colonialism is independence: when a country governs itself.
+Colonialism means taking control of another country: sending your own settlers to live there, and running its land and its resources for the benefit of your own country. To exploit means to make use of a people, place or thing for your own benefit. The opposite of colonialism is independence: when a country governs itself.
 Your lesson showed three maps. Before 1850, most of Africa was ruled by Africans. By around 1900, almost the whole continent had been divided between European powers. By 1914 the process was complete: the lesson's quiz says that in 1913 only 3% of Africa was independent. Just two countries kept their independence throughout: Ethiopia and Liberia. The United Kingdom and France were the two biggest colonisers, taking about two-thirds of Africa between them. Portugal, Spain, Germany, Belgium and Italy took the rest.
 Why did European countries do this? The lesson's answer is economic. They wanted Africa's natural resources, such as ivory and gold, and they wanted people to enslave and to work for them, so that they could trade more and grow richer. Britain, which colonised much of Africa between the 1870s and the 1900s, also colonised land in Asia, Oceania, North America and South America.
 Worked example — model it step by step, thinking aloud: In 1913 only 3% of Africa was independent. What percentage of the continent was ruled by European countries? (1) The whole continent is 100%. (2) The part that was independent was 3%. (3) The rest was colonised: 100% − 3% = 97%. (4) Check: 97% + 3% = 100%. Answer: 97%.
@@ -17606,11 +17606,11 @@
         <p:spPr>
           <a:xfrm>
             <a:off x="548640" y="1389888"/>
-            <a:ext cx="5074920" cy="1224111"/>
+            <a:ext cx="5074920" cy="1595967"/>
           </a:xfrm>
           <a:prstGeom prst="roundRect">
             <a:avLst>
-              <a:gd name="adj" fmla="val 5976"/>
+              <a:gd name="adj" fmla="val 4584"/>
             </a:avLst>
           </a:prstGeom>
           <a:solidFill>
@@ -17627,7 +17627,7 @@
         </p:nvSpPr>
         <p:spPr>
           <a:xfrm>
-            <a:off x="676656" y="1835651"/>
+            <a:off x="676656" y="2021579"/>
             <a:ext cx="384048" cy="332586"/>
           </a:xfrm>
           <a:prstGeom prst="hexagon">
@@ -17648,7 +17648,7 @@
         <p:spPr>
           <a:xfrm>
             <a:off x="1143000" y="1389888"/>
-            <a:ext cx="4389120" cy="1224111"/>
+            <a:ext cx="4389120" cy="1595967"/>
           </a:xfrm>
           <a:prstGeom prst="rect">
             <a:avLst/>
@@ -17672,7 +17672,7 @@
                 <a:ea typeface="Calibri" pitchFamily="34" charset="-122"/>
                 <a:cs typeface="Calibri" pitchFamily="34" charset="-120"/>
               </a:rPr>
-              <a:t>Colonialism is the practice of acquiring control over another country, occupying it with settlers and exploiting it economically.</a:t>
+              <a:t>Colonialism means taking control of another country: sending your own settlers to live there, and running its land and its resources for the benefit of your own country.</a:t>
             </a:r>
             <a:endParaRPr lang="en-US" sz="1800" dirty="0"/>
           </a:p>
@@ -17686,12 +17686,12 @@
         </p:nvSpPr>
         <p:spPr>
           <a:xfrm>
-            <a:off x="548640" y="2760303"/>
-            <a:ext cx="5074920" cy="945219"/>
+            <a:off x="548640" y="3132159"/>
+            <a:ext cx="5074920" cy="759291"/>
           </a:xfrm>
           <a:prstGeom prst="roundRect">
             <a:avLst>
-              <a:gd name="adj" fmla="val 7739"/>
+              <a:gd name="adj" fmla="val 9634"/>
             </a:avLst>
           </a:prstGeom>
           <a:solidFill>
@@ -17708,7 +17708,7 @@
         </p:nvSpPr>
         <p:spPr>
           <a:xfrm>
-            <a:off x="676656" y="3066619"/>
+            <a:off x="676656" y="3345511"/>
             <a:ext cx="384048" cy="332586"/>
           </a:xfrm>
           <a:prstGeom prst="hexagon">
@@ -17728,8 +17728,8 @@
         </p:nvSpPr>
         <p:spPr>
           <a:xfrm>
-            <a:off x="1143000" y="2760303"/>
-            <a:ext cx="4389120" cy="945219"/>
+            <a:off x="1143000" y="3132159"/>
+            <a:ext cx="4389120" cy="759291"/>
           </a:xfrm>
           <a:prstGeom prst="rect">
             <a:avLst/>
@@ -17767,12 +17767,12 @@
         </p:nvSpPr>
         <p:spPr>
           <a:xfrm>
-            <a:off x="548640" y="3851825"/>
-            <a:ext cx="5074920" cy="945219"/>
+            <a:off x="548640" y="4037753"/>
+            <a:ext cx="5074920" cy="759291"/>
           </a:xfrm>
           <a:prstGeom prst="roundRect">
             <a:avLst>
-              <a:gd name="adj" fmla="val 7739"/>
+              <a:gd name="adj" fmla="val 9634"/>
             </a:avLst>
           </a:prstGeom>
           <a:solidFill>
@@ -17789,7 +17789,7 @@
         </p:nvSpPr>
         <p:spPr>
           <a:xfrm>
-            <a:off x="676656" y="4158142"/>
+            <a:off x="676656" y="4251106"/>
             <a:ext cx="384048" cy="332586"/>
           </a:xfrm>
           <a:prstGeom prst="hexagon">
@@ -17809,8 +17809,8 @@
         </p:nvSpPr>
         <p:spPr>
           <a:xfrm>
-            <a:off x="1143000" y="3851825"/>
-            <a:ext cx="4389120" cy="945219"/>
+            <a:off x="1143000" y="4037753"/>
+            <a:ext cx="4389120" cy="759291"/>
           </a:xfrm>
           <a:prstGeom prst="rect">
             <a:avLst/>
